--- a/03-课件PPT/讲次版/第5章-5-讲次 5-5 · Trace Analysis 与平台集.pptx
+++ b/03-课件PPT/讲次版/第5章-5-讲次 5-5 · Trace Analysis 与平台集.pptx
@@ -12112,7 +12112,7 @@
           <a:noFill/>
         </p:spPr>
         <p:txBody>
-          <a:bodyPr wrap="none" anchor="ctr">
+          <a:bodyPr wrap="square" anchor="ctr">
             <a:spAutoFit/>
           </a:bodyPr>
           <a:lstStyle/>
@@ -12123,7 +12123,7 @@
               </a:lnSpc>
             </a:pPr>
             <a:r>
-              <a:rPr sz="1100" b="1">
+              <a:rPr sz="1300" b="1">
                 <a:solidFill>
                   <a:srgbClr val="0B1D3A"/>
                 </a:solidFill>
@@ -12243,7 +12243,7 @@
           <a:noFill/>
         </p:spPr>
         <p:txBody>
-          <a:bodyPr wrap="none" anchor="ctr">
+          <a:bodyPr wrap="square" anchor="ctr">
             <a:spAutoFit/>
           </a:bodyPr>
           <a:lstStyle/>
@@ -12374,7 +12374,7 @@
           <a:noFill/>
         </p:spPr>
         <p:txBody>
-          <a:bodyPr wrap="none" anchor="ctr">
+          <a:bodyPr wrap="square" anchor="ctr">
             <a:spAutoFit/>
           </a:bodyPr>
           <a:lstStyle/>
@@ -12756,7 +12756,7 @@
           <a:noFill/>
         </p:spPr>
         <p:txBody>
-          <a:bodyPr wrap="none" anchor="ctr">
+          <a:bodyPr wrap="square" anchor="ctr">
             <a:spAutoFit/>
           </a:bodyPr>
           <a:lstStyle/>
@@ -12887,7 +12887,7 @@
           <a:noFill/>
         </p:spPr>
         <p:txBody>
-          <a:bodyPr wrap="none" anchor="ctr">
+          <a:bodyPr wrap="square" anchor="ctr">
             <a:spAutoFit/>
           </a:bodyPr>
           <a:lstStyle/>
@@ -13018,7 +13018,7 @@
           <a:noFill/>
         </p:spPr>
         <p:txBody>
-          <a:bodyPr wrap="none" anchor="ctr">
+          <a:bodyPr wrap="square" anchor="ctr">
             <a:spAutoFit/>
           </a:bodyPr>
           <a:lstStyle/>
@@ -13400,7 +13400,7 @@
           <a:noFill/>
         </p:spPr>
         <p:txBody>
-          <a:bodyPr wrap="none" anchor="ctr">
+          <a:bodyPr wrap="square" anchor="ctr">
             <a:spAutoFit/>
           </a:bodyPr>
           <a:lstStyle/>
@@ -13531,7 +13531,7 @@
           <a:noFill/>
         </p:spPr>
         <p:txBody>
-          <a:bodyPr wrap="none" anchor="ctr">
+          <a:bodyPr wrap="square" anchor="ctr">
             <a:spAutoFit/>
           </a:bodyPr>
           <a:lstStyle/>
@@ -13662,7 +13662,7 @@
           <a:noFill/>
         </p:spPr>
         <p:txBody>
-          <a:bodyPr wrap="none" anchor="ctr">
+          <a:bodyPr wrap="square" anchor="ctr">
             <a:spAutoFit/>
           </a:bodyPr>
           <a:lstStyle/>
@@ -14044,7 +14044,7 @@
           <a:noFill/>
         </p:spPr>
         <p:txBody>
-          <a:bodyPr wrap="none" anchor="ctr">
+          <a:bodyPr wrap="square" anchor="ctr">
             <a:spAutoFit/>
           </a:bodyPr>
           <a:lstStyle/>
@@ -14175,7 +14175,7 @@
           <a:noFill/>
         </p:spPr>
         <p:txBody>
-          <a:bodyPr wrap="none" anchor="ctr">
+          <a:bodyPr wrap="square" anchor="ctr">
             <a:spAutoFit/>
           </a:bodyPr>
           <a:lstStyle/>
